--- a/slides/presentazioneZanetti.pptx
+++ b/slides/presentazioneZanetti.pptx
@@ -1319,7 +1319,7 @@
           <a:p>
             <a:fld id="{D7A422DF-4847-4D6E-BB97-9B75D56F5D74}" type="datetimeFigureOut">
               <a:rPr lang="it-IT" smtClean="0"/>
-              <a:t>19/08/2026</a:t>
+              <a:t>24/08/2026</a:t>
             </a:fld>
             <a:endParaRPr lang="it-IT"/>
           </a:p>
@@ -1629,38 +1629,6 @@
         <p:txBody>
           <a:bodyPr/>
           <a:lstStyle/>
-          <a:p>
-            <a:pPr marL="0" indent="0">
-              <a:buNone/>
-            </a:pPr>
-            <a:r>
-              <a:rPr lang="it-IT" sz="1200" dirty="0"/>
-              <a:t>Inside a crystal, atoms are arranged in regular planes. If a charged particle enters nearly parallel to these planes, it can become trapped and guided along their curvature, “locked” to the lattice instead of crossing it in a straight line.</a:t>
-            </a:r>
-          </a:p>
-          <a:p>
-            <a:pPr marL="0" indent="0">
-              <a:buNone/>
-            </a:pPr>
-            <a:endParaRPr lang="it-IT" sz="1200" dirty="0"/>
-          </a:p>
-          <a:p>
-            <a:pPr marL="0" indent="0">
-              <a:buNone/>
-            </a:pPr>
-            <a:r>
-              <a:rPr lang="it-IT" sz="1200" dirty="0"/>
-              <a:t>When the crystal is bent, the channeled beam is deflected along with the grating: the crystal acts as a guide, offering a compact alternative to traditional magnets for deflecting or extracting a </a:t>
-            </a:r>
-            <a:r>
-              <a:rPr lang="it-IT" sz="1200" i="1" dirty="0"/>
-              <a:t>particle</a:t>
-            </a:r>
-            <a:r>
-              <a:rPr lang="it-IT" sz="1200" dirty="0"/>
-              <a:t> beam.</a:t>
-            </a:r>
-          </a:p>
           <a:p>
             <a:endParaRPr lang="it-IT" dirty="0"/>
           </a:p>
@@ -4150,8 +4118,8 @@
         </p:nvSpPr>
         <p:spPr/>
       </p:sp>
-      <mc:AlternateContent xmlns:mc="http://schemas.openxmlformats.org/markup-compatibility/2006">
-        <mc:Choice xmlns:a14="http://schemas.microsoft.com/office/drawing/2010/main" Requires="a14">
+      <mc:AlternateContent xmlns:mc="http://schemas.openxmlformats.org/markup-compatibility/2006" xmlns:a14="http://schemas.microsoft.com/office/drawing/2010/main">
+        <mc:Choice Requires="a14">
           <p:sp>
             <p:nvSpPr>
               <p:cNvPr id="3" name="Segnaposto note 2">
@@ -4524,7 +4492,7 @@
             </p:txBody>
           </p:sp>
         </mc:Choice>
-        <mc:Fallback>
+        <mc:Fallback xmlns="">
           <p:sp>
             <p:nvSpPr>
               <p:cNvPr id="3" name="Segnaposto note 2">
@@ -4790,7 +4758,7 @@
           <a:p>
             <a:fld id="{4B734174-4AE7-4BE8-A29D-97641C0FB41A}" type="datetimeFigureOut">
               <a:rPr lang="it-IT" smtClean="0"/>
-              <a:t>19/08/2026</a:t>
+              <a:t>24/08/2026</a:t>
             </a:fld>
             <a:endParaRPr lang="it-IT"/>
           </a:p>
@@ -4988,7 +4956,7 @@
           <a:p>
             <a:fld id="{4B734174-4AE7-4BE8-A29D-97641C0FB41A}" type="datetimeFigureOut">
               <a:rPr lang="it-IT" smtClean="0"/>
-              <a:t>19/08/2026</a:t>
+              <a:t>24/08/2026</a:t>
             </a:fld>
             <a:endParaRPr lang="it-IT"/>
           </a:p>
@@ -5196,7 +5164,7 @@
           <a:p>
             <a:fld id="{4B734174-4AE7-4BE8-A29D-97641C0FB41A}" type="datetimeFigureOut">
               <a:rPr lang="it-IT" smtClean="0"/>
-              <a:t>19/08/2026</a:t>
+              <a:t>24/08/2026</a:t>
             </a:fld>
             <a:endParaRPr lang="it-IT"/>
           </a:p>
@@ -5394,7 +5362,7 @@
           <a:p>
             <a:fld id="{4B734174-4AE7-4BE8-A29D-97641C0FB41A}" type="datetimeFigureOut">
               <a:rPr lang="it-IT" smtClean="0"/>
-              <a:t>19/08/2026</a:t>
+              <a:t>24/08/2026</a:t>
             </a:fld>
             <a:endParaRPr lang="it-IT"/>
           </a:p>
@@ -5669,7 +5637,7 @@
           <a:p>
             <a:fld id="{4B734174-4AE7-4BE8-A29D-97641C0FB41A}" type="datetimeFigureOut">
               <a:rPr lang="it-IT" smtClean="0"/>
-              <a:t>19/08/2026</a:t>
+              <a:t>24/08/2026</a:t>
             </a:fld>
             <a:endParaRPr lang="it-IT"/>
           </a:p>
@@ -5934,7 +5902,7 @@
           <a:p>
             <a:fld id="{4B734174-4AE7-4BE8-A29D-97641C0FB41A}" type="datetimeFigureOut">
               <a:rPr lang="it-IT" smtClean="0"/>
-              <a:t>19/08/2026</a:t>
+              <a:t>24/08/2026</a:t>
             </a:fld>
             <a:endParaRPr lang="it-IT"/>
           </a:p>
@@ -6346,7 +6314,7 @@
           <a:p>
             <a:fld id="{4B734174-4AE7-4BE8-A29D-97641C0FB41A}" type="datetimeFigureOut">
               <a:rPr lang="it-IT" smtClean="0"/>
-              <a:t>19/08/2026</a:t>
+              <a:t>24/08/2026</a:t>
             </a:fld>
             <a:endParaRPr lang="it-IT"/>
           </a:p>
@@ -6487,7 +6455,7 @@
           <a:p>
             <a:fld id="{4B734174-4AE7-4BE8-A29D-97641C0FB41A}" type="datetimeFigureOut">
               <a:rPr lang="it-IT" smtClean="0"/>
-              <a:t>19/08/2026</a:t>
+              <a:t>24/08/2026</a:t>
             </a:fld>
             <a:endParaRPr lang="it-IT"/>
           </a:p>
@@ -6600,7 +6568,7 @@
           <a:p>
             <a:fld id="{4B734174-4AE7-4BE8-A29D-97641C0FB41A}" type="datetimeFigureOut">
               <a:rPr lang="it-IT" smtClean="0"/>
-              <a:t>19/08/2026</a:t>
+              <a:t>24/08/2026</a:t>
             </a:fld>
             <a:endParaRPr lang="it-IT"/>
           </a:p>
@@ -6911,7 +6879,7 @@
           <a:p>
             <a:fld id="{4B734174-4AE7-4BE8-A29D-97641C0FB41A}" type="datetimeFigureOut">
               <a:rPr lang="it-IT" smtClean="0"/>
-              <a:t>19/08/2026</a:t>
+              <a:t>24/08/2026</a:t>
             </a:fld>
             <a:endParaRPr lang="it-IT"/>
           </a:p>
@@ -7199,7 +7167,7 @@
           <a:p>
             <a:fld id="{4B734174-4AE7-4BE8-A29D-97641C0FB41A}" type="datetimeFigureOut">
               <a:rPr lang="it-IT" smtClean="0"/>
-              <a:t>19/08/2026</a:t>
+              <a:t>24/08/2026</a:t>
             </a:fld>
             <a:endParaRPr lang="it-IT"/>
           </a:p>
@@ -7440,7 +7408,7 @@
           <a:p>
             <a:fld id="{4B734174-4AE7-4BE8-A29D-97641C0FB41A}" type="datetimeFigureOut">
               <a:rPr lang="it-IT" smtClean="0"/>
-              <a:t>19/08/2026</a:t>
+              <a:t>24/08/2026</a:t>
             </a:fld>
             <a:endParaRPr lang="it-IT"/>
           </a:p>
@@ -8392,8 +8360,8 @@
           </a:p>
         </p:txBody>
       </p:sp>
-      <mc:AlternateContent xmlns:mc="http://schemas.openxmlformats.org/markup-compatibility/2006">
-        <mc:Choice xmlns:a14="http://schemas.microsoft.com/office/drawing/2010/main" Requires="a14">
+      <mc:AlternateContent xmlns:mc="http://schemas.openxmlformats.org/markup-compatibility/2006" xmlns:a14="http://schemas.microsoft.com/office/drawing/2010/main">
+        <mc:Choice Requires="a14">
           <p:sp>
             <p:nvSpPr>
               <p:cNvPr id="12" name="Rettangolo con angoli arrotondati 6">
@@ -8594,7 +8562,7 @@
             </p:txBody>
           </p:sp>
         </mc:Choice>
-        <mc:Fallback>
+        <mc:Fallback xmlns="">
           <p:sp>
             <p:nvSpPr>
               <p:cNvPr id="12" name="Rettangolo con angoli arrotondati 6">
@@ -8679,8 +8647,8 @@
           </a:prstGeom>
         </p:spPr>
       </p:pic>
-      <mc:AlternateContent xmlns:mc="http://schemas.openxmlformats.org/markup-compatibility/2006">
-        <mc:Choice xmlns:a14="http://schemas.microsoft.com/office/drawing/2010/main" Requires="a14">
+      <mc:AlternateContent xmlns:mc="http://schemas.openxmlformats.org/markup-compatibility/2006" xmlns:a14="http://schemas.microsoft.com/office/drawing/2010/main">
+        <mc:Choice Requires="a14">
           <p:sp>
             <p:nvSpPr>
               <p:cNvPr id="23" name="Segnaposto contenuto 2">
@@ -8812,7 +8780,7 @@
             </p:txBody>
           </p:sp>
         </mc:Choice>
-        <mc:Fallback>
+        <mc:Fallback xmlns="">
           <p:sp>
             <p:nvSpPr>
               <p:cNvPr id="23" name="Segnaposto contenuto 2">
@@ -9090,8 +9058,8 @@
           </a:p>
         </p:txBody>
       </p:sp>
-      <mc:AlternateContent xmlns:mc="http://schemas.openxmlformats.org/markup-compatibility/2006">
-        <mc:Choice xmlns:a14="http://schemas.microsoft.com/office/drawing/2010/main" Requires="a14">
+      <mc:AlternateContent xmlns:mc="http://schemas.openxmlformats.org/markup-compatibility/2006" xmlns:a14="http://schemas.microsoft.com/office/drawing/2010/main">
+        <mc:Choice Requires="a14">
           <p:sp>
             <p:nvSpPr>
               <p:cNvPr id="20" name="Rettangolo con angoli arrotondati 6">
@@ -9444,7 +9412,7 @@
             </p:txBody>
           </p:sp>
         </mc:Choice>
-        <mc:Fallback>
+        <mc:Fallback xmlns="">
           <p:sp>
             <p:nvSpPr>
               <p:cNvPr id="20" name="Rettangolo con angoli arrotondati 6">
@@ -9585,8 +9553,8 @@
           </a:p>
         </p:txBody>
       </p:sp>
-      <mc:AlternateContent xmlns:mc="http://schemas.openxmlformats.org/markup-compatibility/2006">
-        <mc:Choice xmlns:a14="http://schemas.microsoft.com/office/drawing/2010/main" Requires="a14">
+      <mc:AlternateContent xmlns:mc="http://schemas.openxmlformats.org/markup-compatibility/2006" xmlns:a14="http://schemas.microsoft.com/office/drawing/2010/main">
+        <mc:Choice Requires="a14">
           <p:sp>
             <p:nvSpPr>
               <p:cNvPr id="14" name="Rettangolo con angoli arrotondati 6">
@@ -9747,7 +9715,7 @@
             </p:txBody>
           </p:sp>
         </mc:Choice>
-        <mc:Fallback>
+        <mc:Fallback xmlns="">
           <p:sp>
             <p:nvSpPr>
               <p:cNvPr id="14" name="Rettangolo con angoli arrotondati 6">
@@ -9797,8 +9765,8 @@
           </p:sp>
         </mc:Fallback>
       </mc:AlternateContent>
-      <mc:AlternateContent xmlns:mc="http://schemas.openxmlformats.org/markup-compatibility/2006">
-        <mc:Choice xmlns:a14="http://schemas.microsoft.com/office/drawing/2010/main" Requires="a14">
+      <mc:AlternateContent xmlns:mc="http://schemas.openxmlformats.org/markup-compatibility/2006" xmlns:a14="http://schemas.microsoft.com/office/drawing/2010/main">
+        <mc:Choice Requires="a14">
           <p:sp>
             <p:nvSpPr>
               <p:cNvPr id="16" name="Rettangolo con angoli arrotondati 6">
@@ -9984,7 +9952,7 @@
             </p:txBody>
           </p:sp>
         </mc:Choice>
-        <mc:Fallback>
+        <mc:Fallback xmlns="">
           <p:sp>
             <p:nvSpPr>
               <p:cNvPr id="16" name="Rettangolo con angoli arrotondati 6">
@@ -10350,8 +10318,8 @@
           </a:p>
         </p:txBody>
       </p:sp>
-      <mc:AlternateContent xmlns:mc="http://schemas.openxmlformats.org/markup-compatibility/2006">
-        <mc:Choice xmlns:a14="http://schemas.microsoft.com/office/drawing/2010/main" Requires="a14">
+      <mc:AlternateContent xmlns:mc="http://schemas.openxmlformats.org/markup-compatibility/2006" xmlns:a14="http://schemas.microsoft.com/office/drawing/2010/main">
+        <mc:Choice Requires="a14">
           <p:sp>
             <p:nvSpPr>
               <p:cNvPr id="7" name="Rettangolo con angoli arrotondati 25">
@@ -10553,7 +10521,7 @@
             </p:txBody>
           </p:sp>
         </mc:Choice>
-        <mc:Fallback>
+        <mc:Fallback xmlns="">
           <p:sp>
             <p:nvSpPr>
               <p:cNvPr id="7" name="Rettangolo con angoli arrotondati 25">
@@ -10660,8 +10628,8 @@
             </a:prstGeom>
           </p:spPr>
         </p:pic>
-        <mc:AlternateContent xmlns:mc="http://schemas.openxmlformats.org/markup-compatibility/2006">
-          <mc:Choice xmlns:a14="http://schemas.microsoft.com/office/drawing/2010/main" Requires="a14">
+        <mc:AlternateContent xmlns:mc="http://schemas.openxmlformats.org/markup-compatibility/2006" xmlns:a14="http://schemas.microsoft.com/office/drawing/2010/main">
+          <mc:Choice Requires="a14">
             <p:sp>
               <p:nvSpPr>
                 <p:cNvPr id="17" name="CasellaDiTesto 6">
@@ -10740,7 +10708,7 @@
               </p:txBody>
             </p:sp>
           </mc:Choice>
-          <mc:Fallback>
+          <mc:Fallback xmlns="">
             <p:sp>
               <p:nvSpPr>
                 <p:cNvPr id="17" name="CasellaDiTesto 6">
@@ -10887,8 +10855,8 @@
             </a:fontRef>
           </p:style>
         </p:cxnSp>
-        <mc:AlternateContent xmlns:mc="http://schemas.openxmlformats.org/markup-compatibility/2006">
-          <mc:Choice xmlns:a14="http://schemas.microsoft.com/office/drawing/2010/main" Requires="a14">
+        <mc:AlternateContent xmlns:mc="http://schemas.openxmlformats.org/markup-compatibility/2006" xmlns:a14="http://schemas.microsoft.com/office/drawing/2010/main">
+          <mc:Choice Requires="a14">
             <p:sp>
               <p:nvSpPr>
                 <p:cNvPr id="18" name="CasellaDiTesto 11">
@@ -10967,7 +10935,7 @@
               </p:txBody>
             </p:sp>
           </mc:Choice>
-          <mc:Fallback>
+          <mc:Fallback xmlns="">
             <p:sp>
               <p:nvSpPr>
                 <p:cNvPr id="18" name="CasellaDiTesto 11">
@@ -11456,8 +11424,8 @@
           </a:p>
         </p:txBody>
       </p:sp>
-      <mc:AlternateContent xmlns:mc="http://schemas.openxmlformats.org/markup-compatibility/2006">
-        <mc:Choice xmlns:a14="http://schemas.microsoft.com/office/drawing/2010/main" Requires="a14">
+      <mc:AlternateContent xmlns:mc="http://schemas.openxmlformats.org/markup-compatibility/2006" xmlns:a14="http://schemas.microsoft.com/office/drawing/2010/main">
+        <mc:Choice Requires="a14">
           <p:sp>
             <p:nvSpPr>
               <p:cNvPr id="12" name="Rettangolo con angoli arrotondati 25">
@@ -11695,7 +11663,7 @@
             </p:txBody>
           </p:sp>
         </mc:Choice>
-        <mc:Fallback>
+        <mc:Fallback xmlns="">
           <p:sp>
             <p:nvSpPr>
               <p:cNvPr id="12" name="Rettangolo con angoli arrotondati 25">
@@ -11745,8 +11713,8 @@
           </p:sp>
         </mc:Fallback>
       </mc:AlternateContent>
-      <mc:AlternateContent xmlns:mc="http://schemas.openxmlformats.org/markup-compatibility/2006">
-        <mc:Choice xmlns:a14="http://schemas.microsoft.com/office/drawing/2010/main" Requires="a14">
+      <mc:AlternateContent xmlns:mc="http://schemas.openxmlformats.org/markup-compatibility/2006" xmlns:a14="http://schemas.microsoft.com/office/drawing/2010/main">
+        <mc:Choice Requires="a14">
           <p:graphicFrame>
             <p:nvGraphicFramePr>
               <p:cNvPr id="21" name="Table 20">
@@ -12091,13 +12059,7 @@
                                       <a:rPr lang="en-US" sz="2000" b="0" i="1" smtClean="0">
                                         <a:latin typeface="Cambria Math" panose="02040503050406030204" pitchFamily="18" charset="0"/>
                                       </a:rPr>
-                                      <m:t>18.0</m:t>
-                                    </m:r>
-                                    <m:r>
-                                      <a:rPr lang="en-US" sz="2000" b="0" i="1" smtClean="0">
-                                        <a:latin typeface="Cambria Math" panose="02040503050406030204" pitchFamily="18" charset="0"/>
-                                      </a:rPr>
-                                      <m:t>±0.1±0.2</m:t>
+                                      <m:t>18.0±0.1±0.2</m:t>
                                     </m:r>
                                   </m:e>
                                 </m:d>
@@ -12153,31 +12115,7 @@
                                       <a:rPr lang="en-US" sz="2000" b="0" i="1" smtClean="0">
                                         <a:latin typeface="Cambria Math" panose="02040503050406030204" pitchFamily="18" charset="0"/>
                                       </a:rPr>
-                                      <m:t>3</m:t>
-                                    </m:r>
-                                    <m:r>
-                                      <a:rPr lang="en-US" sz="2000" b="0" i="1" smtClean="0">
-                                        <a:latin typeface="Cambria Math" panose="02040503050406030204" pitchFamily="18" charset="0"/>
-                                      </a:rPr>
-                                      <m:t>.</m:t>
-                                    </m:r>
-                                    <m:r>
-                                      <a:rPr lang="en-US" sz="2000" b="0" i="1" smtClean="0">
-                                        <a:latin typeface="Cambria Math" panose="02040503050406030204" pitchFamily="18" charset="0"/>
-                                      </a:rPr>
-                                      <m:t>77</m:t>
-                                    </m:r>
-                                    <m:r>
-                                      <a:rPr lang="en-US" sz="2000" b="0" i="1" smtClean="0">
-                                        <a:latin typeface="Cambria Math" panose="02040503050406030204" pitchFamily="18" charset="0"/>
-                                      </a:rPr>
-                                      <m:t>±0.0</m:t>
-                                    </m:r>
-                                    <m:r>
-                                      <a:rPr lang="en-US" sz="2000" b="0" i="1" smtClean="0">
-                                        <a:latin typeface="Cambria Math" panose="02040503050406030204" pitchFamily="18" charset="0"/>
-                                      </a:rPr>
-                                      <m:t>1</m:t>
+                                      <m:t>3.77±0.01</m:t>
                                     </m:r>
                                   </m:e>
                                 </m:d>
@@ -12230,7 +12168,7 @@
             </a:graphic>
           </p:graphicFrame>
         </mc:Choice>
-        <mc:Fallback>
+        <mc:Fallback xmlns="">
           <p:graphicFrame>
             <p:nvGraphicFramePr>
               <p:cNvPr id="21" name="Table 20">
@@ -13120,8 +13058,8 @@
             <a:chExt cx="5519744" cy="2329867"/>
           </a:xfrm>
         </p:grpSpPr>
-        <mc:AlternateContent xmlns:mc="http://schemas.openxmlformats.org/markup-compatibility/2006">
-          <mc:Choice xmlns:a14="http://schemas.microsoft.com/office/drawing/2010/main" Requires="a14">
+        <mc:AlternateContent xmlns:mc="http://schemas.openxmlformats.org/markup-compatibility/2006" xmlns:a14="http://schemas.microsoft.com/office/drawing/2010/main">
+          <mc:Choice Requires="a14">
             <p:sp>
               <p:nvSpPr>
                 <p:cNvPr id="12" name="Rettangolo con angoli arrotondati 25">
@@ -13351,7 +13289,7 @@
               </p:txBody>
             </p:sp>
           </mc:Choice>
-          <mc:Fallback>
+          <mc:Fallback xmlns="">
             <p:sp>
               <p:nvSpPr>
                 <p:cNvPr id="12" name="Rettangolo con angoli arrotondati 25">
@@ -13401,8 +13339,8 @@
             </p:sp>
           </mc:Fallback>
         </mc:AlternateContent>
-        <mc:AlternateContent xmlns:mc="http://schemas.openxmlformats.org/markup-compatibility/2006">
-          <mc:Choice xmlns:a14="http://schemas.microsoft.com/office/drawing/2010/main" Requires="a14">
+        <mc:AlternateContent xmlns:mc="http://schemas.openxmlformats.org/markup-compatibility/2006" xmlns:a14="http://schemas.microsoft.com/office/drawing/2010/main">
+          <mc:Choice Requires="a14">
             <p:sp>
               <p:nvSpPr>
                 <p:cNvPr id="7" name="Rettangolo con angoli arrotondati 25">
@@ -13483,16 +13421,7 @@
                             </a:solidFill>
                             <a:latin typeface="Cambria Math" panose="02040503050406030204" pitchFamily="18" charset="0"/>
                           </a:rPr>
-                          <m:t>𝟏</m:t>
-                        </m:r>
-                        <m:r>
-                          <a:rPr lang="en-US" sz="2800" b="1" i="1" dirty="0" smtClean="0">
-                            <a:solidFill>
-                              <a:srgbClr val="FFC000"/>
-                            </a:solidFill>
-                            <a:latin typeface="Cambria Math" panose="02040503050406030204" pitchFamily="18" charset="0"/>
-                          </a:rPr>
-                          <m:t>𝟖</m:t>
+                          <m:t>𝟏𝟖</m:t>
                         </m:r>
                         <m:r>
                           <a:rPr lang="en-US" sz="2800" b="1" i="1" dirty="0" smtClean="0">
@@ -13641,7 +13570,7 @@
               </p:txBody>
             </p:sp>
           </mc:Choice>
-          <mc:Fallback>
+          <mc:Fallback xmlns="">
             <p:sp>
               <p:nvSpPr>
                 <p:cNvPr id="7" name="Rettangolo con angoli arrotondati 25">
@@ -13870,8 +13799,8 @@
           </a:p>
         </p:txBody>
       </p:sp>
-      <mc:AlternateContent xmlns:mc="http://schemas.openxmlformats.org/markup-compatibility/2006">
-        <mc:Choice xmlns:a14="http://schemas.microsoft.com/office/drawing/2010/main" Requires="a14">
+      <mc:AlternateContent xmlns:mc="http://schemas.openxmlformats.org/markup-compatibility/2006" xmlns:a14="http://schemas.microsoft.com/office/drawing/2010/main">
+        <mc:Choice Requires="a14">
           <p:sp>
             <p:nvSpPr>
               <p:cNvPr id="16" name="Oval 15">
@@ -13949,7 +13878,7 @@
             </p:txBody>
           </p:sp>
         </mc:Choice>
-        <mc:Fallback>
+        <mc:Fallback xmlns="">
           <p:sp>
             <p:nvSpPr>
               <p:cNvPr id="16" name="Oval 15">
@@ -13999,8 +13928,8 @@
           </p:sp>
         </mc:Fallback>
       </mc:AlternateContent>
-      <mc:AlternateContent xmlns:mc="http://schemas.openxmlformats.org/markup-compatibility/2006">
-        <mc:Choice xmlns:a14="http://schemas.microsoft.com/office/drawing/2010/main" Requires="a14">
+      <mc:AlternateContent xmlns:mc="http://schemas.openxmlformats.org/markup-compatibility/2006" xmlns:a14="http://schemas.microsoft.com/office/drawing/2010/main">
+        <mc:Choice Requires="a14">
           <p:sp>
             <p:nvSpPr>
               <p:cNvPr id="18" name="Oval 17">
@@ -14061,16 +13990,7 @@
                           </a:solidFill>
                           <a:latin typeface="Cambria Math" panose="02040503050406030204" pitchFamily="18" charset="0"/>
                         </a:rPr>
-                        <m:t>0.2</m:t>
-                      </m:r>
-                      <m:r>
-                        <a:rPr lang="en-US" sz="2800" b="0" i="1" smtClean="0">
-                          <a:solidFill>
-                            <a:schemeClr val="tx1"/>
-                          </a:solidFill>
-                          <a:latin typeface="Cambria Math" panose="02040503050406030204" pitchFamily="18" charset="0"/>
-                        </a:rPr>
-                        <m:t>%</m:t>
+                        <m:t>0.2%</m:t>
                       </m:r>
                     </m:oMath>
                   </m:oMathPara>
@@ -14084,7 +14004,7 @@
             </p:txBody>
           </p:sp>
         </mc:Choice>
-        <mc:Fallback>
+        <mc:Fallback xmlns="">
           <p:sp>
             <p:nvSpPr>
               <p:cNvPr id="18" name="Oval 17">
@@ -14450,8 +14370,8 @@
           </a:p>
         </p:txBody>
       </p:sp>
-      <mc:AlternateContent xmlns:mc="http://schemas.openxmlformats.org/markup-compatibility/2006">
-        <mc:Choice xmlns:a14="http://schemas.microsoft.com/office/drawing/2010/main" Requires="a14">
+      <mc:AlternateContent xmlns:mc="http://schemas.openxmlformats.org/markup-compatibility/2006" xmlns:a14="http://schemas.microsoft.com/office/drawing/2010/main">
+        <mc:Choice Requires="a14">
           <p:graphicFrame>
             <p:nvGraphicFramePr>
               <p:cNvPr id="21" name="Table 20">
@@ -14905,7 +14825,7 @@
             </a:graphic>
           </p:graphicFrame>
         </mc:Choice>
-        <mc:Fallback>
+        <mc:Fallback xmlns="">
           <p:graphicFrame>
             <p:nvGraphicFramePr>
               <p:cNvPr id="21" name="Table 20">
@@ -15221,8 +15141,8 @@
           </a:fontRef>
         </p:style>
       </p:cxnSp>
-      <mc:AlternateContent xmlns:mc="http://schemas.openxmlformats.org/markup-compatibility/2006">
-        <mc:Choice xmlns:a14="http://schemas.microsoft.com/office/drawing/2010/main" Requires="a14">
+      <mc:AlternateContent xmlns:mc="http://schemas.openxmlformats.org/markup-compatibility/2006" xmlns:a14="http://schemas.microsoft.com/office/drawing/2010/main">
+        <mc:Choice Requires="a14">
           <p:sp>
             <p:nvSpPr>
               <p:cNvPr id="20" name="TextBox 19">
@@ -15338,16 +15258,7 @@
                             </a:solidFill>
                             <a:latin typeface="Cambria Math" panose="02040503050406030204" pitchFamily="18" charset="0"/>
                           </a:rPr>
-                          <m:t>15.8</m:t>
-                        </m:r>
-                        <m:r>
-                          <a:rPr lang="en-US" sz="2000" b="0" i="1" smtClean="0">
-                            <a:solidFill>
-                              <a:srgbClr val="FFC000"/>
-                            </a:solidFill>
-                            <a:latin typeface="Cambria Math" panose="02040503050406030204" pitchFamily="18" charset="0"/>
-                          </a:rPr>
-                          <m:t>±0.1</m:t>
+                          <m:t>15.8±0.1</m:t>
                         </m:r>
                       </m:e>
                     </m:d>
@@ -15517,7 +15428,7 @@
             </p:txBody>
           </p:sp>
         </mc:Choice>
-        <mc:Fallback>
+        <mc:Fallback xmlns="">
           <p:sp>
             <p:nvSpPr>
               <p:cNvPr id="20" name="TextBox 19">
@@ -15878,8 +15789,8 @@
           </a:p>
         </p:txBody>
       </p:sp>
-      <mc:AlternateContent xmlns:mc="http://schemas.openxmlformats.org/markup-compatibility/2006">
-        <mc:Choice xmlns:a14="http://schemas.microsoft.com/office/drawing/2010/main" Requires="a14">
+      <mc:AlternateContent xmlns:mc="http://schemas.openxmlformats.org/markup-compatibility/2006" xmlns:a14="http://schemas.microsoft.com/office/drawing/2010/main">
+        <mc:Choice Requires="a14">
           <p:sp>
             <p:nvSpPr>
               <p:cNvPr id="3" name="Segnaposto contenuto 2">
@@ -16015,7 +15926,7 @@
             </p:txBody>
           </p:sp>
         </mc:Choice>
-        <mc:Fallback>
+        <mc:Fallback xmlns="">
           <p:sp>
             <p:nvSpPr>
               <p:cNvPr id="3" name="Segnaposto contenuto 2">
@@ -18218,8 +18129,8 @@
           </a:fontRef>
         </p:style>
       </p:cxnSp>
-      <mc:AlternateContent xmlns:mc="http://schemas.openxmlformats.org/markup-compatibility/2006">
-        <mc:Choice xmlns:a14="http://schemas.microsoft.com/office/drawing/2010/main" Requires="a14">
+      <mc:AlternateContent xmlns:mc="http://schemas.openxmlformats.org/markup-compatibility/2006" xmlns:a14="http://schemas.microsoft.com/office/drawing/2010/main">
+        <mc:Choice Requires="a14">
           <p:sp>
             <p:nvSpPr>
               <p:cNvPr id="25" name="Rectangle: Rounded Corners 24">
@@ -18369,7 +18280,7 @@
             </p:txBody>
           </p:sp>
         </mc:Choice>
-        <mc:Fallback>
+        <mc:Fallback xmlns="">
           <p:sp>
             <p:nvSpPr>
               <p:cNvPr id="25" name="Rectangle: Rounded Corners 24">
@@ -19118,8 +19029,8 @@
           </a:p>
         </p:txBody>
       </p:sp>
-      <mc:AlternateContent xmlns:mc="http://schemas.openxmlformats.org/markup-compatibility/2006">
-        <mc:Choice xmlns:a14="http://schemas.microsoft.com/office/drawing/2010/main" Requires="a14">
+      <mc:AlternateContent xmlns:mc="http://schemas.openxmlformats.org/markup-compatibility/2006" xmlns:a14="http://schemas.microsoft.com/office/drawing/2010/main">
+        <mc:Choice Requires="a14">
           <p:sp>
             <p:nvSpPr>
               <p:cNvPr id="3" name="Segnaposto contenuto 2">
@@ -19966,7 +19877,7 @@
             </p:txBody>
           </p:sp>
         </mc:Choice>
-        <mc:Fallback>
+        <mc:Fallback xmlns="">
           <p:sp>
             <p:nvSpPr>
               <p:cNvPr id="3" name="Segnaposto contenuto 2">
@@ -20921,8 +20832,8 @@
           </a:prstGeom>
         </p:spPr>
       </p:pic>
-      <mc:AlternateContent xmlns:mc="http://schemas.openxmlformats.org/markup-compatibility/2006">
-        <mc:Choice xmlns:a14="http://schemas.microsoft.com/office/drawing/2010/main" Requires="a14">
+      <mc:AlternateContent xmlns:mc="http://schemas.openxmlformats.org/markup-compatibility/2006" xmlns:a14="http://schemas.microsoft.com/office/drawing/2010/main">
+        <mc:Choice Requires="a14">
           <p:sp>
             <p:nvSpPr>
               <p:cNvPr id="14" name="Rectangle: Rounded Corners 13">
@@ -21180,7 +21091,7 @@
             </p:txBody>
           </p:sp>
         </mc:Choice>
-        <mc:Fallback>
+        <mc:Fallback xmlns="">
           <p:sp>
             <p:nvSpPr>
               <p:cNvPr id="14" name="Rectangle: Rounded Corners 13">
@@ -21348,8 +21259,8 @@
           </a:p>
         </p:txBody>
       </p:sp>
-      <mc:AlternateContent xmlns:mc="http://schemas.openxmlformats.org/markup-compatibility/2006">
-        <mc:Choice xmlns:a14="http://schemas.microsoft.com/office/drawing/2010/main" Requires="a14">
+      <mc:AlternateContent xmlns:mc="http://schemas.openxmlformats.org/markup-compatibility/2006" xmlns:a14="http://schemas.microsoft.com/office/drawing/2010/main">
+        <mc:Choice Requires="a14">
           <p:sp>
             <p:nvSpPr>
               <p:cNvPr id="3" name="Segnaposto contenuto 2">
@@ -21450,7 +21361,7 @@
             </p:txBody>
           </p:sp>
         </mc:Choice>
-        <mc:Fallback>
+        <mc:Fallback xmlns="">
           <p:sp>
             <p:nvSpPr>
               <p:cNvPr id="3" name="Segnaposto contenuto 2">
@@ -22092,8 +22003,8 @@
           </a:p>
         </p:txBody>
       </p:sp>
-      <mc:AlternateContent xmlns:mc="http://schemas.openxmlformats.org/markup-compatibility/2006">
-        <mc:Choice xmlns:a14="http://schemas.microsoft.com/office/drawing/2010/main" Requires="a14">
+      <mc:AlternateContent xmlns:mc="http://schemas.openxmlformats.org/markup-compatibility/2006" xmlns:a14="http://schemas.microsoft.com/office/drawing/2010/main">
+        <mc:Choice Requires="a14">
           <p:sp>
             <p:nvSpPr>
               <p:cNvPr id="12" name="CasellaDiTesto 11">
@@ -22385,7 +22296,7 @@
             </p:txBody>
           </p:sp>
         </mc:Choice>
-        <mc:Fallback>
+        <mc:Fallback xmlns="">
           <p:sp>
             <p:nvSpPr>
               <p:cNvPr id="12" name="CasellaDiTesto 11">
@@ -22550,8 +22461,8 @@
               </a:fontRef>
             </p:style>
           </p:cxnSp>
-          <mc:AlternateContent xmlns:mc="http://schemas.openxmlformats.org/markup-compatibility/2006">
-            <mc:Choice xmlns:a14="http://schemas.microsoft.com/office/drawing/2010/main" Requires="a14">
+          <mc:AlternateContent xmlns:mc="http://schemas.openxmlformats.org/markup-compatibility/2006" xmlns:a14="http://schemas.microsoft.com/office/drawing/2010/main">
+            <mc:Choice Requires="a14">
               <p:sp>
                 <p:nvSpPr>
                   <p:cNvPr id="11" name="Rettangolo con angoli arrotondati 10">
@@ -22695,7 +22606,7 @@
                 </p:txBody>
               </p:sp>
             </mc:Choice>
-            <mc:Fallback>
+            <mc:Fallback xmlns="">
               <p:sp>
                 <p:nvSpPr>
                   <p:cNvPr id="11" name="Rettangolo con angoli arrotondati 10">
@@ -24377,12 +24288,20 @@
               </a:p>
               <a:p>
                 <a:r>
+                  <a:rPr lang="en-US" sz="2000" b="1" dirty="0">
+                    <a:solidFill>
+                      <a:schemeClr val="tx1"/>
+                    </a:solidFill>
+                  </a:rPr>
+                  <a:t>ALADDIN</a:t>
+                </a:r>
+                <a:r>
                   <a:rPr lang="en-US" sz="2000" dirty="0">
                     <a:solidFill>
                       <a:schemeClr val="tx1"/>
                     </a:solidFill>
                   </a:rPr>
-                  <a:t>ALADDIN: </a:t>
+                  <a:t>: </a:t>
                 </a:r>
                 <a:r>
                   <a:rPr lang="it-IT" sz="2000" dirty="0">
@@ -24458,7 +24377,15 @@
                       <a:schemeClr val="tx1"/>
                     </a:solidFill>
                   </a:rPr>
-                  <a:t> particles to induce a strong deflection (spin precession)</a:t>
+                  <a:t> particles to induce a strong deflection (spin precession) and measure their </a:t>
+                </a:r>
+                <a:r>
+                  <a:rPr lang="en-US" sz="2000" b="1" dirty="0">
+                    <a:solidFill>
+                      <a:schemeClr val="tx1"/>
+                    </a:solidFill>
+                  </a:rPr>
+                  <a:t>dipole moment</a:t>
                 </a:r>
               </a:p>
             </p:txBody>
@@ -24996,8 +24923,8 @@
           </a:p>
         </p:txBody>
       </p:sp>
-      <mc:AlternateContent xmlns:mc="http://schemas.openxmlformats.org/markup-compatibility/2006">
-        <mc:Choice xmlns:a14="http://schemas.microsoft.com/office/drawing/2010/main" Requires="a14">
+      <mc:AlternateContent xmlns:mc="http://schemas.openxmlformats.org/markup-compatibility/2006" xmlns:a14="http://schemas.microsoft.com/office/drawing/2010/main">
+        <mc:Choice Requires="a14">
           <p:sp>
             <p:nvSpPr>
               <p:cNvPr id="14" name="Rettangolo con angoli arrotondati 8">
@@ -25155,7 +25082,7 @@
             </p:txBody>
           </p:sp>
         </mc:Choice>
-        <mc:Fallback>
+        <mc:Fallback xmlns="">
           <p:sp>
             <p:nvSpPr>
               <p:cNvPr id="14" name="Rettangolo con angoli arrotondati 8">
@@ -27079,8 +27006,8 @@
           </a:prstGeom>
         </p:spPr>
       </p:pic>
-      <mc:AlternateContent xmlns:mc="http://schemas.openxmlformats.org/markup-compatibility/2006">
-        <mc:Choice xmlns:a14="http://schemas.microsoft.com/office/drawing/2010/main" Requires="a14">
+      <mc:AlternateContent xmlns:mc="http://schemas.openxmlformats.org/markup-compatibility/2006" xmlns:a14="http://schemas.microsoft.com/office/drawing/2010/main">
+        <mc:Choice Requires="a14">
           <p:sp>
             <p:nvSpPr>
               <p:cNvPr id="37" name="Rettangolo con angoli arrotondati 6">
@@ -27281,7 +27208,7 @@
             </p:txBody>
           </p:sp>
         </mc:Choice>
-        <mc:Fallback>
+        <mc:Fallback xmlns="">
           <p:sp>
             <p:nvSpPr>
               <p:cNvPr id="37" name="Rettangolo con angoli arrotondati 6">
@@ -27366,8 +27293,8 @@
           </a:prstGeom>
         </p:spPr>
       </p:pic>
-      <mc:AlternateContent xmlns:mc="http://schemas.openxmlformats.org/markup-compatibility/2006">
-        <mc:Choice xmlns:a14="http://schemas.microsoft.com/office/drawing/2010/main" Requires="a14">
+      <mc:AlternateContent xmlns:mc="http://schemas.openxmlformats.org/markup-compatibility/2006" xmlns:a14="http://schemas.microsoft.com/office/drawing/2010/main">
+        <mc:Choice Requires="a14">
           <p:sp>
             <p:nvSpPr>
               <p:cNvPr id="41" name="Rettangolo con angoli arrotondati 6">
@@ -27543,7 +27470,7 @@
             </p:txBody>
           </p:sp>
         </mc:Choice>
-        <mc:Fallback>
+        <mc:Fallback xmlns="">
           <p:sp>
             <p:nvSpPr>
               <p:cNvPr id="41" name="Rettangolo con angoli arrotondati 6">
@@ -27628,8 +27555,8 @@
           </a:prstGeom>
         </p:spPr>
       </p:pic>
-      <mc:AlternateContent xmlns:mc="http://schemas.openxmlformats.org/markup-compatibility/2006">
-        <mc:Choice xmlns:a14="http://schemas.microsoft.com/office/drawing/2010/main" Requires="a14">
+      <mc:AlternateContent xmlns:mc="http://schemas.openxmlformats.org/markup-compatibility/2006" xmlns:a14="http://schemas.microsoft.com/office/drawing/2010/main">
+        <mc:Choice Requires="a14">
           <p:sp>
             <p:nvSpPr>
               <p:cNvPr id="45" name="Rettangolo con angoli arrotondati 6">
@@ -27884,7 +27811,7 @@
             </p:txBody>
           </p:sp>
         </mc:Choice>
-        <mc:Fallback>
+        <mc:Fallback xmlns="">
           <p:sp>
             <p:nvSpPr>
               <p:cNvPr id="45" name="Rettangolo con angoli arrotondati 6">
@@ -28947,8 +28874,8 @@
             </a:prstGeom>
           </p:spPr>
         </p:pic>
-        <mc:AlternateContent xmlns:mc="http://schemas.openxmlformats.org/markup-compatibility/2006">
-          <mc:Choice xmlns:a14="http://schemas.microsoft.com/office/drawing/2010/main" Requires="a14">
+        <mc:AlternateContent xmlns:mc="http://schemas.openxmlformats.org/markup-compatibility/2006" xmlns:a14="http://schemas.microsoft.com/office/drawing/2010/main">
+          <mc:Choice Requires="a14">
             <p:sp>
               <p:nvSpPr>
                 <p:cNvPr id="14" name="Rettangolo con angoli arrotondati 10">
@@ -29063,7 +28990,7 @@
               </p:txBody>
             </p:sp>
           </mc:Choice>
-          <mc:Fallback>
+          <mc:Fallback xmlns="">
             <p:sp>
               <p:nvSpPr>
                 <p:cNvPr id="14" name="Rettangolo con angoli arrotondati 10">
@@ -29113,8 +29040,8 @@
             </p:sp>
           </mc:Fallback>
         </mc:AlternateContent>
-        <mc:AlternateContent xmlns:mc="http://schemas.openxmlformats.org/markup-compatibility/2006">
-          <mc:Choice xmlns:a14="http://schemas.microsoft.com/office/drawing/2010/main" Requires="a14">
+        <mc:AlternateContent xmlns:mc="http://schemas.openxmlformats.org/markup-compatibility/2006" xmlns:a14="http://schemas.microsoft.com/office/drawing/2010/main">
+          <mc:Choice Requires="a14">
             <p:sp>
               <p:nvSpPr>
                 <p:cNvPr id="15" name="Rettangolo con angoli arrotondati 14">
@@ -29229,7 +29156,7 @@
               </p:txBody>
             </p:sp>
           </mc:Choice>
-          <mc:Fallback>
+          <mc:Fallback xmlns="">
             <p:sp>
               <p:nvSpPr>
                 <p:cNvPr id="15" name="Rettangolo con angoli arrotondati 14">
@@ -30155,8 +30082,8 @@
           </a:p>
         </p:txBody>
       </p:sp>
-      <mc:AlternateContent xmlns:mc="http://schemas.openxmlformats.org/markup-compatibility/2006">
-        <mc:Choice xmlns:a14="http://schemas.microsoft.com/office/drawing/2010/main" Requires="a14">
+      <mc:AlternateContent xmlns:mc="http://schemas.openxmlformats.org/markup-compatibility/2006" xmlns:a14="http://schemas.microsoft.com/office/drawing/2010/main">
+        <mc:Choice Requires="a14">
           <p:sp>
             <p:nvSpPr>
               <p:cNvPr id="24" name="Rettangolo con angoli arrotondati 6">
@@ -30303,7 +30230,7 @@
             </p:txBody>
           </p:sp>
         </mc:Choice>
-        <mc:Fallback>
+        <mc:Fallback xmlns="">
           <p:sp>
             <p:nvSpPr>
               <p:cNvPr id="24" name="Rettangolo con angoli arrotondati 6">
@@ -30525,8 +30452,8 @@
           </p:txBody>
         </p:sp>
       </p:grpSp>
-      <mc:AlternateContent xmlns:mc="http://schemas.openxmlformats.org/markup-compatibility/2006">
-        <mc:Choice xmlns:a14="http://schemas.microsoft.com/office/drawing/2010/main" Requires="a14">
+      <mc:AlternateContent xmlns:mc="http://schemas.openxmlformats.org/markup-compatibility/2006" xmlns:a14="http://schemas.microsoft.com/office/drawing/2010/main">
+        <mc:Choice Requires="a14">
           <p:sp>
             <p:nvSpPr>
               <p:cNvPr id="45" name="Rectangle: Rounded Corners 44">
@@ -30643,7 +30570,7 @@
             </p:txBody>
           </p:sp>
         </mc:Choice>
-        <mc:Fallback>
+        <mc:Fallback xmlns="">
           <p:sp>
             <p:nvSpPr>
               <p:cNvPr id="45" name="Rectangle: Rounded Corners 44">
@@ -31697,8 +31624,8 @@
           </a:p>
         </p:txBody>
       </p:sp>
-      <mc:AlternateContent xmlns:mc="http://schemas.openxmlformats.org/markup-compatibility/2006">
-        <mc:Choice xmlns:a14="http://schemas.microsoft.com/office/drawing/2010/main" Requires="a14">
+      <mc:AlternateContent xmlns:mc="http://schemas.openxmlformats.org/markup-compatibility/2006" xmlns:a14="http://schemas.microsoft.com/office/drawing/2010/main">
+        <mc:Choice Requires="a14">
           <p:sp>
             <p:nvSpPr>
               <p:cNvPr id="26" name="Rettangolo con angoli arrotondati 6">
@@ -31831,7 +31758,7 @@
             </p:txBody>
           </p:sp>
         </mc:Choice>
-        <mc:Fallback>
+        <mc:Fallback xmlns="">
           <p:sp>
             <p:nvSpPr>
               <p:cNvPr id="26" name="Rettangolo con angoli arrotondati 6">
@@ -32352,8 +32279,8 @@
           </p:cxnSp>
         </p:grpSp>
       </p:grpSp>
-      <mc:AlternateContent xmlns:mc="http://schemas.openxmlformats.org/markup-compatibility/2006">
-        <mc:Choice xmlns:a14="http://schemas.microsoft.com/office/drawing/2010/main" Requires="a14">
+      <mc:AlternateContent xmlns:mc="http://schemas.openxmlformats.org/markup-compatibility/2006" xmlns:a14="http://schemas.microsoft.com/office/drawing/2010/main">
+        <mc:Choice Requires="a14">
           <p:sp>
             <p:nvSpPr>
               <p:cNvPr id="44" name="Rectangle: Rounded Corners 43">
@@ -32438,7 +32365,7 @@
             </p:txBody>
           </p:sp>
         </mc:Choice>
-        <mc:Fallback>
+        <mc:Fallback xmlns="">
           <p:sp>
             <p:nvSpPr>
               <p:cNvPr id="44" name="Rectangle: Rounded Corners 43">

--- a/slides/presentazioneZanetti.pptx
+++ b/slides/presentazioneZanetti.pptx
@@ -1319,7 +1319,7 @@
           <a:p>
             <a:fld id="{D7A422DF-4847-4D6E-BB97-9B75D56F5D74}" type="datetimeFigureOut">
               <a:rPr lang="it-IT" smtClean="0"/>
-              <a:t>24/08/2026</a:t>
+              <a:t>25/08/2026</a:t>
             </a:fld>
             <a:endParaRPr lang="it-IT"/>
           </a:p>
@@ -4758,7 +4758,7 @@
           <a:p>
             <a:fld id="{4B734174-4AE7-4BE8-A29D-97641C0FB41A}" type="datetimeFigureOut">
               <a:rPr lang="it-IT" smtClean="0"/>
-              <a:t>24/08/2026</a:t>
+              <a:t>25/08/2026</a:t>
             </a:fld>
             <a:endParaRPr lang="it-IT"/>
           </a:p>
@@ -4956,7 +4956,7 @@
           <a:p>
             <a:fld id="{4B734174-4AE7-4BE8-A29D-97641C0FB41A}" type="datetimeFigureOut">
               <a:rPr lang="it-IT" smtClean="0"/>
-              <a:t>24/08/2026</a:t>
+              <a:t>25/08/2026</a:t>
             </a:fld>
             <a:endParaRPr lang="it-IT"/>
           </a:p>
@@ -5164,7 +5164,7 @@
           <a:p>
             <a:fld id="{4B734174-4AE7-4BE8-A29D-97641C0FB41A}" type="datetimeFigureOut">
               <a:rPr lang="it-IT" smtClean="0"/>
-              <a:t>24/08/2026</a:t>
+              <a:t>25/08/2026</a:t>
             </a:fld>
             <a:endParaRPr lang="it-IT"/>
           </a:p>
@@ -5362,7 +5362,7 @@
           <a:p>
             <a:fld id="{4B734174-4AE7-4BE8-A29D-97641C0FB41A}" type="datetimeFigureOut">
               <a:rPr lang="it-IT" smtClean="0"/>
-              <a:t>24/08/2026</a:t>
+              <a:t>25/08/2026</a:t>
             </a:fld>
             <a:endParaRPr lang="it-IT"/>
           </a:p>
@@ -5637,7 +5637,7 @@
           <a:p>
             <a:fld id="{4B734174-4AE7-4BE8-A29D-97641C0FB41A}" type="datetimeFigureOut">
               <a:rPr lang="it-IT" smtClean="0"/>
-              <a:t>24/08/2026</a:t>
+              <a:t>25/08/2026</a:t>
             </a:fld>
             <a:endParaRPr lang="it-IT"/>
           </a:p>
@@ -5902,7 +5902,7 @@
           <a:p>
             <a:fld id="{4B734174-4AE7-4BE8-A29D-97641C0FB41A}" type="datetimeFigureOut">
               <a:rPr lang="it-IT" smtClean="0"/>
-              <a:t>24/08/2026</a:t>
+              <a:t>25/08/2026</a:t>
             </a:fld>
             <a:endParaRPr lang="it-IT"/>
           </a:p>
@@ -6314,7 +6314,7 @@
           <a:p>
             <a:fld id="{4B734174-4AE7-4BE8-A29D-97641C0FB41A}" type="datetimeFigureOut">
               <a:rPr lang="it-IT" smtClean="0"/>
-              <a:t>24/08/2026</a:t>
+              <a:t>25/08/2026</a:t>
             </a:fld>
             <a:endParaRPr lang="it-IT"/>
           </a:p>
@@ -6455,7 +6455,7 @@
           <a:p>
             <a:fld id="{4B734174-4AE7-4BE8-A29D-97641C0FB41A}" type="datetimeFigureOut">
               <a:rPr lang="it-IT" smtClean="0"/>
-              <a:t>24/08/2026</a:t>
+              <a:t>25/08/2026</a:t>
             </a:fld>
             <a:endParaRPr lang="it-IT"/>
           </a:p>
@@ -6568,7 +6568,7 @@
           <a:p>
             <a:fld id="{4B734174-4AE7-4BE8-A29D-97641C0FB41A}" type="datetimeFigureOut">
               <a:rPr lang="it-IT" smtClean="0"/>
-              <a:t>24/08/2026</a:t>
+              <a:t>25/08/2026</a:t>
             </a:fld>
             <a:endParaRPr lang="it-IT"/>
           </a:p>
@@ -6879,7 +6879,7 @@
           <a:p>
             <a:fld id="{4B734174-4AE7-4BE8-A29D-97641C0FB41A}" type="datetimeFigureOut">
               <a:rPr lang="it-IT" smtClean="0"/>
-              <a:t>24/08/2026</a:t>
+              <a:t>25/08/2026</a:t>
             </a:fld>
             <a:endParaRPr lang="it-IT"/>
           </a:p>
@@ -7167,7 +7167,7 @@
           <a:p>
             <a:fld id="{4B734174-4AE7-4BE8-A29D-97641C0FB41A}" type="datetimeFigureOut">
               <a:rPr lang="it-IT" smtClean="0"/>
-              <a:t>24/08/2026</a:t>
+              <a:t>25/08/2026</a:t>
             </a:fld>
             <a:endParaRPr lang="it-IT"/>
           </a:p>
@@ -7408,7 +7408,7 @@
           <a:p>
             <a:fld id="{4B734174-4AE7-4BE8-A29D-97641C0FB41A}" type="datetimeFigureOut">
               <a:rPr lang="it-IT" smtClean="0"/>
-              <a:t>24/08/2026</a:t>
+              <a:t>25/08/2026</a:t>
             </a:fld>
             <a:endParaRPr lang="it-IT"/>
           </a:p>
@@ -24220,8 +24220,8 @@
           </a:p>
         </p:txBody>
       </p:sp>
-      <mc:AlternateContent xmlns:mc="http://schemas.openxmlformats.org/markup-compatibility/2006">
-        <mc:Choice xmlns:a14="http://schemas.microsoft.com/office/drawing/2010/main" Requires="a14">
+      <mc:AlternateContent xmlns:mc="http://schemas.openxmlformats.org/markup-compatibility/2006" xmlns:a14="http://schemas.microsoft.com/office/drawing/2010/main">
+        <mc:Choice Requires="a14">
           <p:sp>
             <p:nvSpPr>
               <p:cNvPr id="22" name="Rettangolo con angoli arrotondati 6">
@@ -24391,7 +24391,7 @@
             </p:txBody>
           </p:sp>
         </mc:Choice>
-        <mc:Fallback>
+        <mc:Fallback xmlns="">
           <p:sp>
             <p:nvSpPr>
               <p:cNvPr id="22" name="Rettangolo con angoli arrotondati 6">
